--- a/Web Engineering/CSE 413_ Lec02.pptx
+++ b/Web Engineering/CSE 413_ Lec02.pptx
@@ -117,6 +117,22 @@
       </a:defRPr>
     </a:lvl9pPr>
   </p:defaultTextStyle>
+  <p:extLst>
+    <p:ext uri="{EFAFB233-063F-42B5-8137-9DF3F51BA10A}">
+      <p15:sldGuideLst xmlns:p15="http://schemas.microsoft.com/office/powerpoint/2012/main">
+        <p15:guide id="1" orient="horz" pos="2160">
+          <p15:clr>
+            <a:srgbClr val="A4A3A4"/>
+          </p15:clr>
+        </p15:guide>
+        <p15:guide id="2" pos="2880">
+          <p15:clr>
+            <a:srgbClr val="A4A3A4"/>
+          </p15:clr>
+        </p15:guide>
+      </p15:sldGuideLst>
+    </p:ext>
+  </p:extLst>
 </p:presentation>
 </file>
 
@@ -302,7 +318,7 @@
             <a:fld id="{1D8BD707-D9CF-40AE-B4C6-C98DA3205C09}" type="datetimeFigureOut">
               <a:rPr lang="en-US" smtClean="0"/>
               <a:pPr/>
-              <a:t>7/10/2025</a:t>
+              <a:t>7/30/2025</a:t>
             </a:fld>
             <a:endParaRPr lang="en-US"/>
           </a:p>
@@ -469,7 +485,7 @@
             <a:fld id="{1D8BD707-D9CF-40AE-B4C6-C98DA3205C09}" type="datetimeFigureOut">
               <a:rPr lang="en-US" smtClean="0"/>
               <a:pPr/>
-              <a:t>7/10/2025</a:t>
+              <a:t>7/30/2025</a:t>
             </a:fld>
             <a:endParaRPr lang="en-US"/>
           </a:p>
@@ -646,7 +662,7 @@
             <a:fld id="{1D8BD707-D9CF-40AE-B4C6-C98DA3205C09}" type="datetimeFigureOut">
               <a:rPr lang="en-US" smtClean="0"/>
               <a:pPr/>
-              <a:t>7/10/2025</a:t>
+              <a:t>7/30/2025</a:t>
             </a:fld>
             <a:endParaRPr lang="en-US"/>
           </a:p>
@@ -813,7 +829,7 @@
             <a:fld id="{1D8BD707-D9CF-40AE-B4C6-C98DA3205C09}" type="datetimeFigureOut">
               <a:rPr lang="en-US" smtClean="0"/>
               <a:pPr/>
-              <a:t>7/10/2025</a:t>
+              <a:t>7/30/2025</a:t>
             </a:fld>
             <a:endParaRPr lang="en-US"/>
           </a:p>
@@ -1056,7 +1072,7 @@
             <a:fld id="{1D8BD707-D9CF-40AE-B4C6-C98DA3205C09}" type="datetimeFigureOut">
               <a:rPr lang="en-US" smtClean="0"/>
               <a:pPr/>
-              <a:t>7/10/2025</a:t>
+              <a:t>7/30/2025</a:t>
             </a:fld>
             <a:endParaRPr lang="en-US"/>
           </a:p>
@@ -1341,7 +1357,7 @@
             <a:fld id="{1D8BD707-D9CF-40AE-B4C6-C98DA3205C09}" type="datetimeFigureOut">
               <a:rPr lang="en-US" smtClean="0"/>
               <a:pPr/>
-              <a:t>7/10/2025</a:t>
+              <a:t>7/30/2025</a:t>
             </a:fld>
             <a:endParaRPr lang="en-US"/>
           </a:p>
@@ -1760,7 +1776,7 @@
             <a:fld id="{1D8BD707-D9CF-40AE-B4C6-C98DA3205C09}" type="datetimeFigureOut">
               <a:rPr lang="en-US" smtClean="0"/>
               <a:pPr/>
-              <a:t>7/10/2025</a:t>
+              <a:t>7/30/2025</a:t>
             </a:fld>
             <a:endParaRPr lang="en-US"/>
           </a:p>
@@ -1875,7 +1891,7 @@
             <a:fld id="{1D8BD707-D9CF-40AE-B4C6-C98DA3205C09}" type="datetimeFigureOut">
               <a:rPr lang="en-US" smtClean="0"/>
               <a:pPr/>
-              <a:t>7/10/2025</a:t>
+              <a:t>7/30/2025</a:t>
             </a:fld>
             <a:endParaRPr lang="en-US"/>
           </a:p>
@@ -1967,7 +1983,7 @@
             <a:fld id="{1D8BD707-D9CF-40AE-B4C6-C98DA3205C09}" type="datetimeFigureOut">
               <a:rPr lang="en-US" smtClean="0"/>
               <a:pPr/>
-              <a:t>7/10/2025</a:t>
+              <a:t>7/30/2025</a:t>
             </a:fld>
             <a:endParaRPr lang="en-US"/>
           </a:p>
@@ -2241,7 +2257,7 @@
             <a:fld id="{1D8BD707-D9CF-40AE-B4C6-C98DA3205C09}" type="datetimeFigureOut">
               <a:rPr lang="en-US" smtClean="0"/>
               <a:pPr/>
-              <a:t>7/10/2025</a:t>
+              <a:t>7/30/2025</a:t>
             </a:fld>
             <a:endParaRPr lang="en-US"/>
           </a:p>
@@ -2491,7 +2507,7 @@
             <a:fld id="{1D8BD707-D9CF-40AE-B4C6-C98DA3205C09}" type="datetimeFigureOut">
               <a:rPr lang="en-US" smtClean="0"/>
               <a:pPr/>
-              <a:t>7/10/2025</a:t>
+              <a:t>7/30/2025</a:t>
             </a:fld>
             <a:endParaRPr lang="en-US"/>
           </a:p>
@@ -2701,7 +2717,7 @@
             <a:fld id="{1D8BD707-D9CF-40AE-B4C6-C98DA3205C09}" type="datetimeFigureOut">
               <a:rPr lang="en-US" smtClean="0"/>
               <a:pPr/>
-              <a:t>7/10/2025</a:t>
+              <a:t>7/30/2025</a:t>
             </a:fld>
             <a:endParaRPr lang="en-US"/>
           </a:p>
@@ -4036,7 +4052,6 @@
               <a:rPr lang="en-US" dirty="0"/>
               <a:t> Set milestones and deadlines to track progress.</a:t>
             </a:r>
-            <a:endParaRPr lang="en-US" dirty="0"/>
           </a:p>
         </p:txBody>
       </p:sp>
